--- a/content/W01/D3/slides/C2_W01_D03_half1_STUDENT.pptx
+++ b/content/W01/D3/slides/C2_W01_D03_half1_STUDENT.pptx
@@ -3493,14 +3493,14 @@
       </p:sp>
       <p:pic>
         <p:nvPicPr>
-          <p:cNvPr id="6" name="Picture 5" descr="49f8bfdc33fc6f1b.png"/>
+          <p:cNvPr id="6" name="Picture 5" descr="efc99fe31f88f595.png"/>
           <p:cNvPicPr>
             <a:picLocks noChangeAspect="1"/>
           </p:cNvPicPr>
           <p:nvPr/>
         </p:nvPicPr>
         <p:blipFill>
-          <a:blip r:embed="rId2"/>
+          <a:blip r:embed="rId3"/>
           <a:stretch>
             <a:fillRect/>
           </a:stretch>
@@ -4067,14 +4067,14 @@
       </p:sp>
       <p:pic>
         <p:nvPicPr>
-          <p:cNvPr id="6" name="Picture 5" descr="0cbdb9dd1d4a9542.png"/>
+          <p:cNvPr id="6" name="Picture 5" descr="b053f4b92bbe4c30.png"/>
           <p:cNvPicPr>
             <a:picLocks noChangeAspect="1"/>
           </p:cNvPicPr>
           <p:nvPr/>
         </p:nvPicPr>
         <p:blipFill>
-          <a:blip r:embed="rId2"/>
+          <a:blip r:embed="rId3"/>
           <a:stretch>
             <a:fillRect/>
           </a:stretch>
@@ -7198,14 +7198,14 @@
       </p:sp>
       <p:pic>
         <p:nvPicPr>
-          <p:cNvPr id="6" name="Picture 5" descr="931c004845e8fd99.png"/>
+          <p:cNvPr id="6" name="Picture 5" descr="f0a0958bc85a6b6e.png"/>
           <p:cNvPicPr>
             <a:picLocks noChangeAspect="1"/>
           </p:cNvPicPr>
           <p:nvPr/>
         </p:nvPicPr>
         <p:blipFill>
-          <a:blip r:embed="rId2"/>
+          <a:blip r:embed="rId3"/>
           <a:stretch>
             <a:fillRect/>
           </a:stretch>
@@ -10881,14 +10881,14 @@
       </p:sp>
       <p:pic>
         <p:nvPicPr>
-          <p:cNvPr id="6" name="Picture 5" descr="814ac2f14e8ea245.png"/>
+          <p:cNvPr id="6" name="Picture 5" descr="a24351ddfa494e7c.png"/>
           <p:cNvPicPr>
             <a:picLocks noChangeAspect="1"/>
           </p:cNvPicPr>
           <p:nvPr/>
         </p:nvPicPr>
         <p:blipFill>
-          <a:blip r:embed="rId2"/>
+          <a:blip r:embed="rId3"/>
           <a:stretch>
             <a:fillRect/>
           </a:stretch>

--- a/content/W01/D3/slides/C2_W01_D03_half1_STUDENT.pptx
+++ b/content/W01/D3/slides/C2_W01_D03_half1_STUDENT.pptx
@@ -3493,7 +3493,7 @@
       </p:sp>
       <p:pic>
         <p:nvPicPr>
-          <p:cNvPr id="6" name="Picture 5" descr="efc99fe31f88f595.png"/>
+          <p:cNvPr id="6" name="Picture 5" descr="621bce7d5ba86b83.png"/>
           <p:cNvPicPr>
             <a:picLocks noChangeAspect="1"/>
           </p:cNvPicPr>
@@ -3507,8 +3507,8 @@
         </p:blipFill>
         <p:spPr>
           <a:xfrm>
-            <a:off x="4935785" y="1517904"/>
-            <a:ext cx="2320124" cy="3670807"/>
+            <a:off x="4847312" y="1517904"/>
+            <a:ext cx="2497070" cy="3670807"/>
           </a:xfrm>
           <a:prstGeom prst="rect">
             <a:avLst/>
@@ -4067,7 +4067,7 @@
       </p:sp>
       <p:pic>
         <p:nvPicPr>
-          <p:cNvPr id="6" name="Picture 5" descr="b053f4b92bbe4c30.png"/>
+          <p:cNvPr id="6" name="Picture 5" descr="d0e58245c3fe20eb.png"/>
           <p:cNvPicPr>
             <a:picLocks noChangeAspect="1"/>
           </p:cNvPicPr>
@@ -4081,8 +4081,8 @@
         </p:blipFill>
         <p:spPr>
           <a:xfrm>
-            <a:off x="685800" y="2341295"/>
-            <a:ext cx="4652640" cy="2998368"/>
+            <a:off x="685800" y="1919057"/>
+            <a:ext cx="4652640" cy="3842845"/>
           </a:xfrm>
           <a:prstGeom prst="rect">
             <a:avLst/>
@@ -10881,7 +10881,7 @@
       </p:sp>
       <p:pic>
         <p:nvPicPr>
-          <p:cNvPr id="6" name="Picture 5" descr="a24351ddfa494e7c.png"/>
+          <p:cNvPr id="6" name="Picture 5" descr="7d37758466487cfd.png"/>
           <p:cNvPicPr>
             <a:picLocks noChangeAspect="1"/>
           </p:cNvPicPr>
@@ -10895,8 +10895,8 @@
         </p:blipFill>
         <p:spPr>
           <a:xfrm>
-            <a:off x="685799" y="2063687"/>
-            <a:ext cx="10820095" cy="2496945"/>
+            <a:off x="685800" y="2197112"/>
+            <a:ext cx="10820095" cy="2230095"/>
           </a:xfrm>
           <a:prstGeom prst="rect">
             <a:avLst/>
@@ -10911,7 +10911,7 @@
         </p:nvSpPr>
         <p:spPr>
           <a:xfrm>
-            <a:off x="685800" y="4706936"/>
+            <a:off x="685800" y="4573511"/>
             <a:ext cx="10820095" cy="910336"/>
           </a:xfrm>
           <a:prstGeom prst="rect">
